--- a/TPM_2_Validaciones.pptx
+++ b/TPM_2_Validaciones.pptx
@@ -3030,8 +3030,8 @@
         </p:nvSpPr>
         <p:spPr bwMode="auto">
           <a:xfrm>
-            <a:off x="7071374" y="2286753"/>
-            <a:ext cx="2744430" cy="1325620"/>
+            <a:off x="7132320" y="2212848"/>
+            <a:ext cx="2633472" cy="914400"/>
           </a:xfrm>
           <a:prstGeom prst="rect">
             <a:avLst/>
@@ -3152,26 +3152,29 @@
             </a:lvl9pPr>
           </a:lstStyle>
           <a:p>
+            <a:pPr algn="l">
+              <a:spcAft>
+                <a:spcPts val="300"/>
+              </a:spcAft>
+              <a:buNone/>
+            </a:pPr>
             <a:r>
-              <a:rPr lang="ko-KR" altLang="es-MX" sz="1400" b="1" dirty="0"/>
-              <a:t> </a:t>
-            </a:r>
-            <a:r>
-              <a:rPr lang="es-419" altLang="ko-KR" sz="1400" b="1" dirty="0" smtClean="0"/>
+              <a:rPr lang="en-US" altLang="ko-KR" dirty="0" sz="1400" b="1"/>
               <a:t>EFFECT:</a:t>
             </a:r>
-            <a:endParaRPr lang="es-419" altLang="ko-KR" sz="1400" b="1" dirty="0"/>
           </a:p>
           <a:p>
-            <a:pPr marL="171450" indent="-171450">
-              <a:buFont typeface="Arial" panose="020B0604020202020204" pitchFamily="34" charset="0"/>
+            <a:pPr algn="l" marL="171450" indent="-171450">
+              <a:spcAft>
+                <a:spcPts val="200"/>
+              </a:spcAft>
+              <a:buFont typeface="Arial"/>
               <a:buChar char="•"/>
             </a:pPr>
             <a:r>
-              <a:rPr lang="en-US" altLang="ko-KR" dirty="0"/>
-              <a:t>Pallets with an unregistered piece in position 12 went from practically every pallet to none during the validation shift. All changes tagged MOD@@ Guillermo Carrillo in the source code.</a:t>
+              <a:rPr lang="en-US" altLang="ko-KR" dirty="0" sz="1000"/>
+              <a:t>Pallets with an unregistered piece in position 12: from nearly every pallet to none in the validation shift.</a:t>
             </a:r>
-            <a:endParaRPr lang="ko-KR" altLang="en-US" dirty="0"/>
           </a:p>
         </p:txBody>
       </p:sp>
@@ -8126,7 +8129,7 @@
                 <a:latin typeface="Arial Narrow" panose="020B0606020202030204" pitchFamily="34" charset="0"/>
                 <a:ea typeface="LG스마트체 Regular" panose="020B0600000101010101" pitchFamily="50" charset="-127"/>
               </a:rPr>
-              <a:t>Production Engineering</a:t>
+              <a:t>Production</a:t>
             </a:r>
           </a:p>
         </p:txBody>
@@ -8147,8 +8150,8 @@
         </p:nvSpPr>
         <p:spPr bwMode="auto">
           <a:xfrm>
-            <a:off x="7146757" y="4125280"/>
-            <a:ext cx="2410873" cy="2172006"/>
+            <a:off x="7132320" y="4553712"/>
+            <a:ext cx="2633472" cy="1463040"/>
           </a:xfrm>
           <a:prstGeom prst="rect">
             <a:avLst/>
@@ -8269,87 +8272,55 @@
             </a:lvl9pPr>
           </a:lstStyle>
           <a:p>
+            <a:pPr algn="l">
+              <a:spcAft>
+                <a:spcPts val="300"/>
+              </a:spcAft>
+              <a:buNone/>
+            </a:pPr>
             <a:r>
-              <a:rPr lang="es-MX" altLang="ko-KR" sz="1400" b="1" dirty="0" smtClean="0"/>
+              <a:rPr lang="en-US" altLang="ko-KR" dirty="0" sz="1400" b="1"/>
               <a:t>IMPACT:</a:t>
             </a:r>
-            <a:endParaRPr lang="es-419" altLang="ko-KR" sz="1400" b="1" dirty="0" smtClean="0"/>
           </a:p>
           <a:p>
-            <a:pPr marL="171450" indent="-171450">
-              <a:buFont typeface="Arial" panose="020B0604020202020204" pitchFamily="34" charset="0"/>
-              <a:buChar char="•"/>
-            </a:pPr>
-            <a:endParaRPr lang="en-US" altLang="ko-KR" dirty="0"/>
-          </a:p>
-          <a:p>
-            <a:pPr marL="171450" indent="-171450">
-              <a:buFont typeface="Arial" panose="020B0604020202020204" pitchFamily="34" charset="0"/>
+            <a:pPr algn="l" marL="171450" indent="-171450">
+              <a:spcAft>
+                <a:spcPts val="300"/>
+              </a:spcAft>
+              <a:buFont typeface="Arial"/>
               <a:buChar char="•"/>
             </a:pPr>
             <a:r>
-              <a:rPr lang="en-US" altLang="ko-KR" dirty="0"/>
-              <a:t>No more pallets reaching the Unloader with an unregistered piece.</a:t>
-            </a:r>
-            <a:r>
-              <a:rPr lang="en-US" altLang="ko-KR" dirty="0" smtClean="0"/>
-              <a:t/>
+              <a:rPr lang="en-US" altLang="ko-KR" dirty="0" sz="900"/>
+              <a:t>Line 1 output +4.6% (16,678 → 17,449 pcs/day).</a:t>
             </a:r>
           </a:p>
           <a:p>
-            <a:pPr marL="171450" indent="-171450">
-              <a:buFont typeface="Arial" panose="020B0604020202020204" pitchFamily="34" charset="0"/>
-              <a:buChar char="•"/>
-            </a:pPr>
-            <a:endParaRPr lang="en-US" altLang="ko-KR" dirty="0"/>
-          </a:p>
-          <a:p>
-            <a:pPr marL="171450" indent="-171450">
-              <a:buFont typeface="Arial" panose="020B0604020202020204" pitchFamily="34" charset="0"/>
+            <a:pPr algn="l" marL="171450" indent="-171450">
+              <a:spcAft>
+                <a:spcPts val="300"/>
+              </a:spcAft>
+              <a:buFont typeface="Arial"/>
               <a:buChar char="•"/>
             </a:pPr>
             <a:r>
-              <a:rPr lang="es-MX" altLang="ko-KR" dirty="0" err="1"/>
-              <a:t>1211 alarms: baseline 24-36 per 12 h shift. New figure pending measurement.</a:t>
-            </a:r>
-            <a:r>
-              <a:rPr lang="es-MX" altLang="ko-KR" dirty="0"/>
-              <a:t> </a:t>
-            </a:r>
-            <a:r>
-              <a:rPr lang="es-MX" altLang="ko-KR" dirty="0" err="1"/>
-              <a:t/>
-            </a:r>
-            <a:r>
-              <a:rPr lang="es-MX" altLang="ko-KR" dirty="0"/>
-              <a:t> </a:t>
-            </a:r>
-            <a:r>
-              <a:rPr lang="es-MX" altLang="ko-KR" dirty="0" err="1"/>
-              <a:t/>
-            </a:r>
-            <a:r>
-              <a:rPr lang="es-MX" altLang="ko-KR" dirty="0" smtClean="0"/>
-              <a:t/>
+              <a:rPr lang="en-US" altLang="ko-KR" dirty="0" sz="900"/>
+              <a:t>Unloader #02: 6 stop hours on 1 Oct (day output down 8.7%); causes under review in the event log.</a:t>
             </a:r>
           </a:p>
           <a:p>
-            <a:pPr marL="171450" indent="-171450">
-              <a:buFont typeface="Arial" panose="020B0604020202020204" pitchFamily="34" charset="0"/>
-              <a:buChar char="•"/>
-            </a:pPr>
-            <a:endParaRPr lang="es-MX" altLang="ko-KR" dirty="0"/>
-          </a:p>
-          <a:p>
-            <a:pPr marL="171450" indent="-171450">
-              <a:buFont typeface="Arial" panose="020B0604020202020204" pitchFamily="34" charset="0"/>
+            <a:pPr algn="l" marL="171450" indent="-171450">
+              <a:spcAft>
+                <a:spcPts val="300"/>
+              </a:spcAft>
+              <a:buFont typeface="Arial"/>
               <a:buChar char="•"/>
             </a:pPr>
             <a:r>
-              <a:rPr lang="en-US" altLang="ko-KR" dirty="0"/>
-              <a:t>The guards are portable to the rest of the stations without modifying their flowcharts.</a:t>
+              <a:rPr lang="en-US" altLang="ko-KR" dirty="0" sz="900"/>
+              <a:t>1211 alarms: baseline 24-36 per 12 h shift, new figure pending. Guards portable to other stations.</a:t>
             </a:r>
-            <a:endParaRPr lang="ko-KR" altLang="en-US" dirty="0"/>
           </a:p>
         </p:txBody>
       </p:sp>
@@ -8422,6 +8393,1673 @@
               <a:latin typeface="LG스마트체 Regular" panose="020B0600000101010101" pitchFamily="34" charset="-127"/>
               <a:ea typeface="LG스마트체 Regular" panose="020B0600000101010101" pitchFamily="34" charset="-127"/>
             </a:endParaRPr>
+          </a:p>
+        </p:txBody>
+      </p:sp>
+      <p:graphicFrame>
+        <p:nvGraphicFramePr>
+          <p:cNvPr id="301" name="Production results table"/>
+          <p:cNvGraphicFramePr>
+            <a:graphicFrameLocks noGrp="1"/>
+          </p:cNvGraphicFramePr>
+          <p:nvPr/>
+        </p:nvGraphicFramePr>
+        <p:xfrm>
+          <a:off x="7205472" y="3310128"/>
+          <a:ext cx="2542032" cy="1097280"/>
+        </p:xfrm>
+        <a:graphic>
+          <a:graphicData uri="http://schemas.openxmlformats.org/drawingml/2006/table">
+            <a:tbl>
+              <a:tblPr firstRow="1"/>
+              <a:tblGrid>
+                <a:gridCol w="1152144"/>
+                <a:gridCol w="457200"/>
+                <a:gridCol w="457200"/>
+                <a:gridCol w="475488"/>
+              </a:tblGrid>
+              <a:tr h="182880">
+                <a:tc>
+                  <a:txBody>
+                    <a:bodyPr/>
+                    <a:lstStyle/>
+                    <a:p>
+                      <a:pPr algn="ctr"/>
+                      <a:r>
+                        <a:rPr lang="en-US" altLang="ko-KR" dirty="0" sz="800" b="1">
+                          <a:solidFill>
+                            <a:srgbClr val="FFFFFF"/>
+                          </a:solidFill>
+                          <a:latin typeface="Arial"/>
+                          <a:cs typeface="Arial"/>
+                        </a:rPr>
+                        <a:t>Unloader KPI</a:t>
+                      </a:r>
+                    </a:p>
+                  </a:txBody>
+                  <a:tcPr marL="45720" marR="45720" marT="22860" marB="22860" anchor="ctr">
+                    <a:lnL w="6350">
+                      <a:solidFill>
+                        <a:srgbClr val="BFBFBF"/>
+                      </a:solidFill>
+                    </a:lnL>
+                    <a:lnR w="6350">
+                      <a:solidFill>
+                        <a:srgbClr val="BFBFBF"/>
+                      </a:solidFill>
+                    </a:lnR>
+                    <a:lnT w="6350">
+                      <a:solidFill>
+                        <a:srgbClr val="BFBFBF"/>
+                      </a:solidFill>
+                    </a:lnT>
+                    <a:lnB w="6350">
+                      <a:solidFill>
+                        <a:srgbClr val="BFBFBF"/>
+                      </a:solidFill>
+                    </a:lnB>
+                    <a:solidFill>
+                      <a:srgbClr val="595959"/>
+                    </a:solidFill>
+                  </a:tcPr>
+                </a:tc>
+                <a:tc>
+                  <a:txBody>
+                    <a:bodyPr/>
+                    <a:lstStyle/>
+                    <a:p>
+                      <a:pPr algn="ctr"/>
+                      <a:r>
+                        <a:rPr lang="en-US" altLang="ko-KR" dirty="0" sz="800" b="1">
+                          <a:solidFill>
+                            <a:srgbClr val="FFFFFF"/>
+                          </a:solidFill>
+                          <a:latin typeface="Arial"/>
+                          <a:cs typeface="Arial"/>
+                        </a:rPr>
+                        <a:t>12 Aug</a:t>
+                      </a:r>
+                    </a:p>
+                  </a:txBody>
+                  <a:tcPr marL="45720" marR="45720" marT="22860" marB="22860" anchor="ctr">
+                    <a:lnL w="6350">
+                      <a:solidFill>
+                        <a:srgbClr val="BFBFBF"/>
+                      </a:solidFill>
+                    </a:lnL>
+                    <a:lnR w="6350">
+                      <a:solidFill>
+                        <a:srgbClr val="BFBFBF"/>
+                      </a:solidFill>
+                    </a:lnR>
+                    <a:lnT w="6350">
+                      <a:solidFill>
+                        <a:srgbClr val="BFBFBF"/>
+                      </a:solidFill>
+                    </a:lnT>
+                    <a:lnB w="6350">
+                      <a:solidFill>
+                        <a:srgbClr val="BFBFBF"/>
+                      </a:solidFill>
+                    </a:lnB>
+                    <a:solidFill>
+                      <a:srgbClr val="595959"/>
+                    </a:solidFill>
+                  </a:tcPr>
+                </a:tc>
+                <a:tc>
+                  <a:txBody>
+                    <a:bodyPr/>
+                    <a:lstStyle/>
+                    <a:p>
+                      <a:pPr algn="ctr"/>
+                      <a:r>
+                        <a:rPr lang="en-US" altLang="ko-KR" dirty="0" sz="800" b="1">
+                          <a:solidFill>
+                            <a:srgbClr val="FFFFFF"/>
+                          </a:solidFill>
+                          <a:latin typeface="Arial"/>
+                          <a:cs typeface="Arial"/>
+                        </a:rPr>
+                        <a:t>1 Oct</a:t>
+                      </a:r>
+                    </a:p>
+                  </a:txBody>
+                  <a:tcPr marL="45720" marR="45720" marT="22860" marB="22860" anchor="ctr">
+                    <a:lnL w="6350">
+                      <a:solidFill>
+                        <a:srgbClr val="BFBFBF"/>
+                      </a:solidFill>
+                    </a:lnL>
+                    <a:lnR w="6350">
+                      <a:solidFill>
+                        <a:srgbClr val="BFBFBF"/>
+                      </a:solidFill>
+                    </a:lnR>
+                    <a:lnT w="6350">
+                      <a:solidFill>
+                        <a:srgbClr val="BFBFBF"/>
+                      </a:solidFill>
+                    </a:lnT>
+                    <a:lnB w="6350">
+                      <a:solidFill>
+                        <a:srgbClr val="BFBFBF"/>
+                      </a:solidFill>
+                    </a:lnB>
+                    <a:solidFill>
+                      <a:srgbClr val="595959"/>
+                    </a:solidFill>
+                  </a:tcPr>
+                </a:tc>
+                <a:tc>
+                  <a:txBody>
+                    <a:bodyPr/>
+                    <a:lstStyle/>
+                    <a:p>
+                      <a:pPr algn="ctr"/>
+                      <a:r>
+                        <a:rPr lang="en-US" altLang="ko-KR" dirty="0" sz="800" b="1">
+                          <a:solidFill>
+                            <a:srgbClr val="FFFFFF"/>
+                          </a:solidFill>
+                          <a:latin typeface="Arial"/>
+                          <a:cs typeface="Arial"/>
+                        </a:rPr>
+                        <a:t>Change</a:t>
+                      </a:r>
+                    </a:p>
+                  </a:txBody>
+                  <a:tcPr marL="45720" marR="45720" marT="22860" marB="22860" anchor="ctr">
+                    <a:lnL w="6350">
+                      <a:solidFill>
+                        <a:srgbClr val="BFBFBF"/>
+                      </a:solidFill>
+                    </a:lnL>
+                    <a:lnR w="6350">
+                      <a:solidFill>
+                        <a:srgbClr val="BFBFBF"/>
+                      </a:solidFill>
+                    </a:lnR>
+                    <a:lnT w="6350">
+                      <a:solidFill>
+                        <a:srgbClr val="BFBFBF"/>
+                      </a:solidFill>
+                    </a:lnT>
+                    <a:lnB w="6350">
+                      <a:solidFill>
+                        <a:srgbClr val="BFBFBF"/>
+                      </a:solidFill>
+                    </a:lnB>
+                    <a:solidFill>
+                      <a:srgbClr val="595959"/>
+                    </a:solidFill>
+                  </a:tcPr>
+                </a:tc>
+              </a:tr>
+              <a:tr h="182880">
+                <a:tc>
+                  <a:txBody>
+                    <a:bodyPr/>
+                    <a:lstStyle/>
+                    <a:p>
+                      <a:pPr algn="l"/>
+                      <a:r>
+                        <a:rPr lang="en-US" altLang="ko-KR" dirty="0" sz="800">
+                          <a:solidFill>
+                            <a:srgbClr val="262626"/>
+                          </a:solidFill>
+                          <a:latin typeface="Arial"/>
+                          <a:cs typeface="Arial"/>
+                        </a:rPr>
+                        <a:t>#01 output/day (pcs)</a:t>
+                      </a:r>
+                    </a:p>
+                  </a:txBody>
+                  <a:tcPr marL="45720" marR="45720" marT="22860" marB="22860" anchor="ctr">
+                    <a:lnL w="6350">
+                      <a:solidFill>
+                        <a:srgbClr val="BFBFBF"/>
+                      </a:solidFill>
+                    </a:lnL>
+                    <a:lnR w="6350">
+                      <a:solidFill>
+                        <a:srgbClr val="BFBFBF"/>
+                      </a:solidFill>
+                    </a:lnR>
+                    <a:lnT w="6350">
+                      <a:solidFill>
+                        <a:srgbClr val="BFBFBF"/>
+                      </a:solidFill>
+                    </a:lnT>
+                    <a:lnB w="6350">
+                      <a:solidFill>
+                        <a:srgbClr val="BFBFBF"/>
+                      </a:solidFill>
+                    </a:lnB>
+                    <a:solidFill>
+                      <a:srgbClr val="F2F2F2"/>
+                    </a:solidFill>
+                  </a:tcPr>
+                </a:tc>
+                <a:tc>
+                  <a:txBody>
+                    <a:bodyPr/>
+                    <a:lstStyle/>
+                    <a:p>
+                      <a:pPr algn="ctr"/>
+                      <a:r>
+                        <a:rPr lang="en-US" altLang="ko-KR" dirty="0" sz="800">
+                          <a:solidFill>
+                            <a:srgbClr val="262626"/>
+                          </a:solidFill>
+                          <a:latin typeface="Arial"/>
+                          <a:cs typeface="Arial"/>
+                        </a:rPr>
+                        <a:t>7,881</a:t>
+                      </a:r>
+                    </a:p>
+                  </a:txBody>
+                  <a:tcPr marL="45720" marR="45720" marT="22860" marB="22860" anchor="ctr">
+                    <a:lnL w="6350">
+                      <a:solidFill>
+                        <a:srgbClr val="BFBFBF"/>
+                      </a:solidFill>
+                    </a:lnL>
+                    <a:lnR w="6350">
+                      <a:solidFill>
+                        <a:srgbClr val="BFBFBF"/>
+                      </a:solidFill>
+                    </a:lnR>
+                    <a:lnT w="6350">
+                      <a:solidFill>
+                        <a:srgbClr val="BFBFBF"/>
+                      </a:solidFill>
+                    </a:lnT>
+                    <a:lnB w="6350">
+                      <a:solidFill>
+                        <a:srgbClr val="BFBFBF"/>
+                      </a:solidFill>
+                    </a:lnB>
+                  </a:tcPr>
+                </a:tc>
+                <a:tc>
+                  <a:txBody>
+                    <a:bodyPr/>
+                    <a:lstStyle/>
+                    <a:p>
+                      <a:pPr algn="ctr"/>
+                      <a:r>
+                        <a:rPr lang="en-US" altLang="ko-KR" dirty="0" sz="800">
+                          <a:solidFill>
+                            <a:srgbClr val="262626"/>
+                          </a:solidFill>
+                          <a:latin typeface="Arial"/>
+                          <a:cs typeface="Arial"/>
+                        </a:rPr>
+                        <a:t>9,418</a:t>
+                      </a:r>
+                    </a:p>
+                  </a:txBody>
+                  <a:tcPr marL="45720" marR="45720" marT="22860" marB="22860" anchor="ctr">
+                    <a:lnL w="6350">
+                      <a:solidFill>
+                        <a:srgbClr val="BFBFBF"/>
+                      </a:solidFill>
+                    </a:lnL>
+                    <a:lnR w="6350">
+                      <a:solidFill>
+                        <a:srgbClr val="BFBFBF"/>
+                      </a:solidFill>
+                    </a:lnR>
+                    <a:lnT w="6350">
+                      <a:solidFill>
+                        <a:srgbClr val="BFBFBF"/>
+                      </a:solidFill>
+                    </a:lnT>
+                    <a:lnB w="6350">
+                      <a:solidFill>
+                        <a:srgbClr val="BFBFBF"/>
+                      </a:solidFill>
+                    </a:lnB>
+                  </a:tcPr>
+                </a:tc>
+                <a:tc>
+                  <a:txBody>
+                    <a:bodyPr/>
+                    <a:lstStyle/>
+                    <a:p>
+                      <a:pPr algn="ctr"/>
+                      <a:r>
+                        <a:rPr lang="en-US" altLang="ko-KR" dirty="0" sz="800" b="1">
+                          <a:solidFill>
+                            <a:srgbClr val="00703C"/>
+                          </a:solidFill>
+                          <a:latin typeface="Arial"/>
+                          <a:cs typeface="Arial"/>
+                        </a:rPr>
+                        <a:t>+19.5%</a:t>
+                      </a:r>
+                    </a:p>
+                  </a:txBody>
+                  <a:tcPr marL="45720" marR="45720" marT="22860" marB="22860" anchor="ctr">
+                    <a:lnL w="6350">
+                      <a:solidFill>
+                        <a:srgbClr val="BFBFBF"/>
+                      </a:solidFill>
+                    </a:lnL>
+                    <a:lnR w="6350">
+                      <a:solidFill>
+                        <a:srgbClr val="BFBFBF"/>
+                      </a:solidFill>
+                    </a:lnR>
+                    <a:lnT w="6350">
+                      <a:solidFill>
+                        <a:srgbClr val="BFBFBF"/>
+                      </a:solidFill>
+                    </a:lnT>
+                    <a:lnB w="6350">
+                      <a:solidFill>
+                        <a:srgbClr val="BFBFBF"/>
+                      </a:solidFill>
+                    </a:lnB>
+                  </a:tcPr>
+                </a:tc>
+              </a:tr>
+              <a:tr h="182880">
+                <a:tc>
+                  <a:txBody>
+                    <a:bodyPr/>
+                    <a:lstStyle/>
+                    <a:p>
+                      <a:pPr algn="l"/>
+                      <a:r>
+                        <a:rPr lang="en-US" altLang="ko-KR" dirty="0" sz="800">
+                          <a:solidFill>
+                            <a:srgbClr val="262626"/>
+                          </a:solidFill>
+                          <a:latin typeface="Arial"/>
+                          <a:cs typeface="Arial"/>
+                        </a:rPr>
+                        <a:t>#01 run rate (pcs/h)*</a:t>
+                      </a:r>
+                    </a:p>
+                  </a:txBody>
+                  <a:tcPr marL="45720" marR="45720" marT="22860" marB="22860" anchor="ctr">
+                    <a:lnL w="6350">
+                      <a:solidFill>
+                        <a:srgbClr val="BFBFBF"/>
+                      </a:solidFill>
+                    </a:lnL>
+                    <a:lnR w="6350">
+                      <a:solidFill>
+                        <a:srgbClr val="BFBFBF"/>
+                      </a:solidFill>
+                    </a:lnR>
+                    <a:lnT w="6350">
+                      <a:solidFill>
+                        <a:srgbClr val="BFBFBF"/>
+                      </a:solidFill>
+                    </a:lnT>
+                    <a:lnB w="6350">
+                      <a:solidFill>
+                        <a:srgbClr val="BFBFBF"/>
+                      </a:solidFill>
+                    </a:lnB>
+                    <a:solidFill>
+                      <a:srgbClr val="F2F2F2"/>
+                    </a:solidFill>
+                  </a:tcPr>
+                </a:tc>
+                <a:tc>
+                  <a:txBody>
+                    <a:bodyPr/>
+                    <a:lstStyle/>
+                    <a:p>
+                      <a:pPr algn="ctr"/>
+                      <a:r>
+                        <a:rPr lang="en-US" altLang="ko-KR" dirty="0" sz="800">
+                          <a:solidFill>
+                            <a:srgbClr val="262626"/>
+                          </a:solidFill>
+                          <a:latin typeface="Arial"/>
+                          <a:cs typeface="Arial"/>
+                        </a:rPr>
+                        <a:t>372.1</a:t>
+                      </a:r>
+                    </a:p>
+                  </a:txBody>
+                  <a:tcPr marL="45720" marR="45720" marT="22860" marB="22860" anchor="ctr">
+                    <a:lnL w="6350">
+                      <a:solidFill>
+                        <a:srgbClr val="BFBFBF"/>
+                      </a:solidFill>
+                    </a:lnL>
+                    <a:lnR w="6350">
+                      <a:solidFill>
+                        <a:srgbClr val="BFBFBF"/>
+                      </a:solidFill>
+                    </a:lnR>
+                    <a:lnT w="6350">
+                      <a:solidFill>
+                        <a:srgbClr val="BFBFBF"/>
+                      </a:solidFill>
+                    </a:lnT>
+                    <a:lnB w="6350">
+                      <a:solidFill>
+                        <a:srgbClr val="BFBFBF"/>
+                      </a:solidFill>
+                    </a:lnB>
+                  </a:tcPr>
+                </a:tc>
+                <a:tc>
+                  <a:txBody>
+                    <a:bodyPr/>
+                    <a:lstStyle/>
+                    <a:p>
+                      <a:pPr algn="ctr"/>
+                      <a:r>
+                        <a:rPr lang="en-US" altLang="ko-KR" dirty="0" sz="800">
+                          <a:solidFill>
+                            <a:srgbClr val="262626"/>
+                          </a:solidFill>
+                          <a:latin typeface="Arial"/>
+                          <a:cs typeface="Arial"/>
+                        </a:rPr>
+                        <a:t>409.1</a:t>
+                      </a:r>
+                    </a:p>
+                  </a:txBody>
+                  <a:tcPr marL="45720" marR="45720" marT="22860" marB="22860" anchor="ctr">
+                    <a:lnL w="6350">
+                      <a:solidFill>
+                        <a:srgbClr val="BFBFBF"/>
+                      </a:solidFill>
+                    </a:lnL>
+                    <a:lnR w="6350">
+                      <a:solidFill>
+                        <a:srgbClr val="BFBFBF"/>
+                      </a:solidFill>
+                    </a:lnR>
+                    <a:lnT w="6350">
+                      <a:solidFill>
+                        <a:srgbClr val="BFBFBF"/>
+                      </a:solidFill>
+                    </a:lnT>
+                    <a:lnB w="6350">
+                      <a:solidFill>
+                        <a:srgbClr val="BFBFBF"/>
+                      </a:solidFill>
+                    </a:lnB>
+                  </a:tcPr>
+                </a:tc>
+                <a:tc>
+                  <a:txBody>
+                    <a:bodyPr/>
+                    <a:lstStyle/>
+                    <a:p>
+                      <a:pPr algn="ctr"/>
+                      <a:r>
+                        <a:rPr lang="en-US" altLang="ko-KR" dirty="0" sz="800" b="1">
+                          <a:solidFill>
+                            <a:srgbClr val="00703C"/>
+                          </a:solidFill>
+                          <a:latin typeface="Arial"/>
+                          <a:cs typeface="Arial"/>
+                        </a:rPr>
+                        <a:t>+10.0%</a:t>
+                      </a:r>
+                    </a:p>
+                  </a:txBody>
+                  <a:tcPr marL="45720" marR="45720" marT="22860" marB="22860" anchor="ctr">
+                    <a:lnL w="6350">
+                      <a:solidFill>
+                        <a:srgbClr val="BFBFBF"/>
+                      </a:solidFill>
+                    </a:lnL>
+                    <a:lnR w="6350">
+                      <a:solidFill>
+                        <a:srgbClr val="BFBFBF"/>
+                      </a:solidFill>
+                    </a:lnR>
+                    <a:lnT w="6350">
+                      <a:solidFill>
+                        <a:srgbClr val="BFBFBF"/>
+                      </a:solidFill>
+                    </a:lnT>
+                    <a:lnB w="6350">
+                      <a:solidFill>
+                        <a:srgbClr val="BFBFBF"/>
+                      </a:solidFill>
+                    </a:lnB>
+                  </a:tcPr>
+                </a:tc>
+              </a:tr>
+              <a:tr h="182880">
+                <a:tc>
+                  <a:txBody>
+                    <a:bodyPr/>
+                    <a:lstStyle/>
+                    <a:p>
+                      <a:pPr algn="l"/>
+                      <a:r>
+                        <a:rPr lang="en-US" altLang="ko-KR" dirty="0" sz="800">
+                          <a:solidFill>
+                            <a:srgbClr val="262626"/>
+                          </a:solidFill>
+                          <a:latin typeface="Arial"/>
+                          <a:cs typeface="Arial"/>
+                        </a:rPr>
+                        <a:t>#01 best hour (pcs)</a:t>
+                      </a:r>
+                    </a:p>
+                  </a:txBody>
+                  <a:tcPr marL="45720" marR="45720" marT="22860" marB="22860" anchor="ctr">
+                    <a:lnL w="6350">
+                      <a:solidFill>
+                        <a:srgbClr val="BFBFBF"/>
+                      </a:solidFill>
+                    </a:lnL>
+                    <a:lnR w="6350">
+                      <a:solidFill>
+                        <a:srgbClr val="BFBFBF"/>
+                      </a:solidFill>
+                    </a:lnR>
+                    <a:lnT w="6350">
+                      <a:solidFill>
+                        <a:srgbClr val="BFBFBF"/>
+                      </a:solidFill>
+                    </a:lnT>
+                    <a:lnB w="6350">
+                      <a:solidFill>
+                        <a:srgbClr val="BFBFBF"/>
+                      </a:solidFill>
+                    </a:lnB>
+                    <a:solidFill>
+                      <a:srgbClr val="F2F2F2"/>
+                    </a:solidFill>
+                  </a:tcPr>
+                </a:tc>
+                <a:tc>
+                  <a:txBody>
+                    <a:bodyPr/>
+                    <a:lstStyle/>
+                    <a:p>
+                      <a:pPr algn="ctr"/>
+                      <a:r>
+                        <a:rPr lang="en-US" altLang="ko-KR" dirty="0" sz="800">
+                          <a:solidFill>
+                            <a:srgbClr val="262626"/>
+                          </a:solidFill>
+                          <a:latin typeface="Arial"/>
+                          <a:cs typeface="Arial"/>
+                        </a:rPr>
+                        <a:t>467</a:t>
+                      </a:r>
+                    </a:p>
+                  </a:txBody>
+                  <a:tcPr marL="45720" marR="45720" marT="22860" marB="22860" anchor="ctr">
+                    <a:lnL w="6350">
+                      <a:solidFill>
+                        <a:srgbClr val="BFBFBF"/>
+                      </a:solidFill>
+                    </a:lnL>
+                    <a:lnR w="6350">
+                      <a:solidFill>
+                        <a:srgbClr val="BFBFBF"/>
+                      </a:solidFill>
+                    </a:lnR>
+                    <a:lnT w="6350">
+                      <a:solidFill>
+                        <a:srgbClr val="BFBFBF"/>
+                      </a:solidFill>
+                    </a:lnT>
+                    <a:lnB w="6350">
+                      <a:solidFill>
+                        <a:srgbClr val="BFBFBF"/>
+                      </a:solidFill>
+                    </a:lnB>
+                  </a:tcPr>
+                </a:tc>
+                <a:tc>
+                  <a:txBody>
+                    <a:bodyPr/>
+                    <a:lstStyle/>
+                    <a:p>
+                      <a:pPr algn="ctr"/>
+                      <a:r>
+                        <a:rPr lang="en-US" altLang="ko-KR" dirty="0" sz="800">
+                          <a:solidFill>
+                            <a:srgbClr val="262626"/>
+                          </a:solidFill>
+                          <a:latin typeface="Arial"/>
+                          <a:cs typeface="Arial"/>
+                        </a:rPr>
+                        <a:t>524</a:t>
+                      </a:r>
+                    </a:p>
+                  </a:txBody>
+                  <a:tcPr marL="45720" marR="45720" marT="22860" marB="22860" anchor="ctr">
+                    <a:lnL w="6350">
+                      <a:solidFill>
+                        <a:srgbClr val="BFBFBF"/>
+                      </a:solidFill>
+                    </a:lnL>
+                    <a:lnR w="6350">
+                      <a:solidFill>
+                        <a:srgbClr val="BFBFBF"/>
+                      </a:solidFill>
+                    </a:lnR>
+                    <a:lnT w="6350">
+                      <a:solidFill>
+                        <a:srgbClr val="BFBFBF"/>
+                      </a:solidFill>
+                    </a:lnT>
+                    <a:lnB w="6350">
+                      <a:solidFill>
+                        <a:srgbClr val="BFBFBF"/>
+                      </a:solidFill>
+                    </a:lnB>
+                  </a:tcPr>
+                </a:tc>
+                <a:tc>
+                  <a:txBody>
+                    <a:bodyPr/>
+                    <a:lstStyle/>
+                    <a:p>
+                      <a:pPr algn="ctr"/>
+                      <a:r>
+                        <a:rPr lang="en-US" altLang="ko-KR" dirty="0" sz="800" b="1">
+                          <a:solidFill>
+                            <a:srgbClr val="00703C"/>
+                          </a:solidFill>
+                          <a:latin typeface="Arial"/>
+                          <a:cs typeface="Arial"/>
+                        </a:rPr>
+                        <a:t>+12.2%</a:t>
+                      </a:r>
+                    </a:p>
+                  </a:txBody>
+                  <a:tcPr marL="45720" marR="45720" marT="22860" marB="22860" anchor="ctr">
+                    <a:lnL w="6350">
+                      <a:solidFill>
+                        <a:srgbClr val="BFBFBF"/>
+                      </a:solidFill>
+                    </a:lnL>
+                    <a:lnR w="6350">
+                      <a:solidFill>
+                        <a:srgbClr val="BFBFBF"/>
+                      </a:solidFill>
+                    </a:lnR>
+                    <a:lnT w="6350">
+                      <a:solidFill>
+                        <a:srgbClr val="BFBFBF"/>
+                      </a:solidFill>
+                    </a:lnT>
+                    <a:lnB w="6350">
+                      <a:solidFill>
+                        <a:srgbClr val="BFBFBF"/>
+                      </a:solidFill>
+                    </a:lnB>
+                  </a:tcPr>
+                </a:tc>
+              </a:tr>
+              <a:tr h="182880">
+                <a:tc>
+                  <a:txBody>
+                    <a:bodyPr/>
+                    <a:lstStyle/>
+                    <a:p>
+                      <a:pPr algn="l"/>
+                      <a:r>
+                        <a:rPr lang="en-US" altLang="ko-KR" dirty="0" sz="800">
+                          <a:solidFill>
+                            <a:srgbClr val="262626"/>
+                          </a:solidFill>
+                          <a:latin typeface="Arial"/>
+                          <a:cs typeface="Arial"/>
+                        </a:rPr>
+                        <a:t>#01 stop hours</a:t>
+                      </a:r>
+                    </a:p>
+                  </a:txBody>
+                  <a:tcPr marL="45720" marR="45720" marT="22860" marB="22860" anchor="ctr">
+                    <a:lnL w="6350">
+                      <a:solidFill>
+                        <a:srgbClr val="BFBFBF"/>
+                      </a:solidFill>
+                    </a:lnL>
+                    <a:lnR w="6350">
+                      <a:solidFill>
+                        <a:srgbClr val="BFBFBF"/>
+                      </a:solidFill>
+                    </a:lnR>
+                    <a:lnT w="6350">
+                      <a:solidFill>
+                        <a:srgbClr val="BFBFBF"/>
+                      </a:solidFill>
+                    </a:lnT>
+                    <a:lnB w="6350">
+                      <a:solidFill>
+                        <a:srgbClr val="BFBFBF"/>
+                      </a:solidFill>
+                    </a:lnB>
+                    <a:solidFill>
+                      <a:srgbClr val="F2F2F2"/>
+                    </a:solidFill>
+                  </a:tcPr>
+                </a:tc>
+                <a:tc>
+                  <a:txBody>
+                    <a:bodyPr/>
+                    <a:lstStyle/>
+                    <a:p>
+                      <a:pPr algn="ctr"/>
+                      <a:r>
+                        <a:rPr lang="en-US" altLang="ko-KR" dirty="0" sz="800">
+                          <a:solidFill>
+                            <a:srgbClr val="262626"/>
+                          </a:solidFill>
+                          <a:latin typeface="Arial"/>
+                          <a:cs typeface="Arial"/>
+                        </a:rPr>
+                        <a:t>4</a:t>
+                      </a:r>
+                    </a:p>
+                  </a:txBody>
+                  <a:tcPr marL="45720" marR="45720" marT="22860" marB="22860" anchor="ctr">
+                    <a:lnL w="6350">
+                      <a:solidFill>
+                        <a:srgbClr val="BFBFBF"/>
+                      </a:solidFill>
+                    </a:lnL>
+                    <a:lnR w="6350">
+                      <a:solidFill>
+                        <a:srgbClr val="BFBFBF"/>
+                      </a:solidFill>
+                    </a:lnR>
+                    <a:lnT w="6350">
+                      <a:solidFill>
+                        <a:srgbClr val="BFBFBF"/>
+                      </a:solidFill>
+                    </a:lnT>
+                    <a:lnB w="6350">
+                      <a:solidFill>
+                        <a:srgbClr val="BFBFBF"/>
+                      </a:solidFill>
+                    </a:lnB>
+                  </a:tcPr>
+                </a:tc>
+                <a:tc>
+                  <a:txBody>
+                    <a:bodyPr/>
+                    <a:lstStyle/>
+                    <a:p>
+                      <a:pPr algn="ctr"/>
+                      <a:r>
+                        <a:rPr lang="en-US" altLang="ko-KR" dirty="0" sz="800">
+                          <a:solidFill>
+                            <a:srgbClr val="262626"/>
+                          </a:solidFill>
+                          <a:latin typeface="Arial"/>
+                          <a:cs typeface="Arial"/>
+                        </a:rPr>
+                        <a:t>2</a:t>
+                      </a:r>
+                    </a:p>
+                  </a:txBody>
+                  <a:tcPr marL="45720" marR="45720" marT="22860" marB="22860" anchor="ctr">
+                    <a:lnL w="6350">
+                      <a:solidFill>
+                        <a:srgbClr val="BFBFBF"/>
+                      </a:solidFill>
+                    </a:lnL>
+                    <a:lnR w="6350">
+                      <a:solidFill>
+                        <a:srgbClr val="BFBFBF"/>
+                      </a:solidFill>
+                    </a:lnR>
+                    <a:lnT w="6350">
+                      <a:solidFill>
+                        <a:srgbClr val="BFBFBF"/>
+                      </a:solidFill>
+                    </a:lnT>
+                    <a:lnB w="6350">
+                      <a:solidFill>
+                        <a:srgbClr val="BFBFBF"/>
+                      </a:solidFill>
+                    </a:lnB>
+                  </a:tcPr>
+                </a:tc>
+                <a:tc>
+                  <a:txBody>
+                    <a:bodyPr/>
+                    <a:lstStyle/>
+                    <a:p>
+                      <a:pPr algn="ctr"/>
+                      <a:r>
+                        <a:rPr lang="en-US" altLang="ko-KR" dirty="0" sz="800" b="1">
+                          <a:solidFill>
+                            <a:srgbClr val="00703C"/>
+                          </a:solidFill>
+                          <a:latin typeface="Arial"/>
+                          <a:cs typeface="Arial"/>
+                        </a:rPr>
+                        <a:t>-2</a:t>
+                      </a:r>
+                    </a:p>
+                  </a:txBody>
+                  <a:tcPr marL="45720" marR="45720" marT="22860" marB="22860" anchor="ctr">
+                    <a:lnL w="6350">
+                      <a:solidFill>
+                        <a:srgbClr val="BFBFBF"/>
+                      </a:solidFill>
+                    </a:lnL>
+                    <a:lnR w="6350">
+                      <a:solidFill>
+                        <a:srgbClr val="BFBFBF"/>
+                      </a:solidFill>
+                    </a:lnR>
+                    <a:lnT w="6350">
+                      <a:solidFill>
+                        <a:srgbClr val="BFBFBF"/>
+                      </a:solidFill>
+                    </a:lnT>
+                    <a:lnB w="6350">
+                      <a:solidFill>
+                        <a:srgbClr val="BFBFBF"/>
+                      </a:solidFill>
+                    </a:lnB>
+                  </a:tcPr>
+                </a:tc>
+              </a:tr>
+              <a:tr h="182880">
+                <a:tc>
+                  <a:txBody>
+                    <a:bodyPr/>
+                    <a:lstStyle/>
+                    <a:p>
+                      <a:pPr algn="l"/>
+                      <a:r>
+                        <a:rPr lang="en-US" altLang="ko-KR" dirty="0" sz="800">
+                          <a:solidFill>
+                            <a:srgbClr val="262626"/>
+                          </a:solidFill>
+                          <a:latin typeface="Arial"/>
+                          <a:cs typeface="Arial"/>
+                        </a:rPr>
+                        <a:t>#02 run rate (pcs/h)*</a:t>
+                      </a:r>
+                    </a:p>
+                  </a:txBody>
+                  <a:tcPr marL="45720" marR="45720" marT="22860" marB="22860" anchor="ctr">
+                    <a:lnL w="6350">
+                      <a:solidFill>
+                        <a:srgbClr val="BFBFBF"/>
+                      </a:solidFill>
+                    </a:lnL>
+                    <a:lnR w="6350">
+                      <a:solidFill>
+                        <a:srgbClr val="BFBFBF"/>
+                      </a:solidFill>
+                    </a:lnR>
+                    <a:lnT w="6350">
+                      <a:solidFill>
+                        <a:srgbClr val="BFBFBF"/>
+                      </a:solidFill>
+                    </a:lnT>
+                    <a:lnB w="6350">
+                      <a:solidFill>
+                        <a:srgbClr val="BFBFBF"/>
+                      </a:solidFill>
+                    </a:lnB>
+                    <a:solidFill>
+                      <a:srgbClr val="F2F2F2"/>
+                    </a:solidFill>
+                  </a:tcPr>
+                </a:tc>
+                <a:tc>
+                  <a:txBody>
+                    <a:bodyPr/>
+                    <a:lstStyle/>
+                    <a:p>
+                      <a:pPr algn="ctr"/>
+                      <a:r>
+                        <a:rPr lang="en-US" altLang="ko-KR" dirty="0" sz="800">
+                          <a:solidFill>
+                            <a:srgbClr val="262626"/>
+                          </a:solidFill>
+                          <a:latin typeface="Arial"/>
+                          <a:cs typeface="Arial"/>
+                        </a:rPr>
+                        <a:t>379.5</a:t>
+                      </a:r>
+                    </a:p>
+                  </a:txBody>
+                  <a:tcPr marL="45720" marR="45720" marT="22860" marB="22860" anchor="ctr">
+                    <a:lnL w="6350">
+                      <a:solidFill>
+                        <a:srgbClr val="BFBFBF"/>
+                      </a:solidFill>
+                    </a:lnL>
+                    <a:lnR w="6350">
+                      <a:solidFill>
+                        <a:srgbClr val="BFBFBF"/>
+                      </a:solidFill>
+                    </a:lnR>
+                    <a:lnT w="6350">
+                      <a:solidFill>
+                        <a:srgbClr val="BFBFBF"/>
+                      </a:solidFill>
+                    </a:lnT>
+                    <a:lnB w="6350">
+                      <a:solidFill>
+                        <a:srgbClr val="BFBFBF"/>
+                      </a:solidFill>
+                    </a:lnB>
+                  </a:tcPr>
+                </a:tc>
+                <a:tc>
+                  <a:txBody>
+                    <a:bodyPr/>
+                    <a:lstStyle/>
+                    <a:p>
+                      <a:pPr algn="ctr"/>
+                      <a:r>
+                        <a:rPr lang="en-US" altLang="ko-KR" dirty="0" sz="800">
+                          <a:solidFill>
+                            <a:srgbClr val="262626"/>
+                          </a:solidFill>
+                          <a:latin typeface="Arial"/>
+                          <a:cs typeface="Arial"/>
+                        </a:rPr>
+                        <a:t>399.6</a:t>
+                      </a:r>
+                    </a:p>
+                  </a:txBody>
+                  <a:tcPr marL="45720" marR="45720" marT="22860" marB="22860" anchor="ctr">
+                    <a:lnL w="6350">
+                      <a:solidFill>
+                        <a:srgbClr val="BFBFBF"/>
+                      </a:solidFill>
+                    </a:lnL>
+                    <a:lnR w="6350">
+                      <a:solidFill>
+                        <a:srgbClr val="BFBFBF"/>
+                      </a:solidFill>
+                    </a:lnR>
+                    <a:lnT w="6350">
+                      <a:solidFill>
+                        <a:srgbClr val="BFBFBF"/>
+                      </a:solidFill>
+                    </a:lnT>
+                    <a:lnB w="6350">
+                      <a:solidFill>
+                        <a:srgbClr val="BFBFBF"/>
+                      </a:solidFill>
+                    </a:lnB>
+                  </a:tcPr>
+                </a:tc>
+                <a:tc>
+                  <a:txBody>
+                    <a:bodyPr/>
+                    <a:lstStyle/>
+                    <a:p>
+                      <a:pPr algn="ctr"/>
+                      <a:r>
+                        <a:rPr lang="en-US" altLang="ko-KR" dirty="0" sz="800" b="1">
+                          <a:solidFill>
+                            <a:srgbClr val="00703C"/>
+                          </a:solidFill>
+                          <a:latin typeface="Arial"/>
+                          <a:cs typeface="Arial"/>
+                        </a:rPr>
+                        <a:t>+5.3%</a:t>
+                      </a:r>
+                    </a:p>
+                  </a:txBody>
+                  <a:tcPr marL="45720" marR="45720" marT="22860" marB="22860" anchor="ctr">
+                    <a:lnL w="6350">
+                      <a:solidFill>
+                        <a:srgbClr val="BFBFBF"/>
+                      </a:solidFill>
+                    </a:lnL>
+                    <a:lnR w="6350">
+                      <a:solidFill>
+                        <a:srgbClr val="BFBFBF"/>
+                      </a:solidFill>
+                    </a:lnR>
+                    <a:lnT w="6350">
+                      <a:solidFill>
+                        <a:srgbClr val="BFBFBF"/>
+                      </a:solidFill>
+                    </a:lnT>
+                    <a:lnB w="6350">
+                      <a:solidFill>
+                        <a:srgbClr val="BFBFBF"/>
+                      </a:solidFill>
+                    </a:lnB>
+                  </a:tcPr>
+                </a:tc>
+              </a:tr>
+            </a:tbl>
+          </a:graphicData>
+        </a:graphic>
+      </p:graphicFrame>
+      <p:sp>
+        <p:nvSpPr>
+          <p:cNvPr id="302" name="Source note"/>
+          <p:cNvSpPr txBox="1"/>
+          <p:nvPr/>
+        </p:nvSpPr>
+        <p:spPr>
+          <a:xfrm>
+            <a:off x="7223760" y="6217920"/>
+            <a:ext cx="2523744" cy="384048"/>
+          </a:xfrm>
+          <a:prstGeom prst="rect">
+            <a:avLst/>
+          </a:prstGeom>
+          <a:noFill/>
+        </p:spPr>
+        <p:txBody>
+          <a:bodyPr wrap="square" lIns="0" tIns="0" rIns="0" bIns="0"/>
+          <a:lstStyle/>
+          <a:p>
+            <a:pPr algn="l">
+              <a:buNone/>
+            </a:pPr>
+            <a:r>
+              <a:rPr lang="en-US" altLang="ko-KR" dirty="0" sz="650">
+                <a:solidFill>
+                  <a:srgbClr val="7F7F7F"/>
+                </a:solidFill>
+              </a:rPr>
+              <a:t>* Run rate = average of hours without stops. Source: hourly production report, TOP TLA Line 1 (12 Aug vs 1 Oct 2026). One-day comparison; reflects all updates combined; 05-07 h of 1 Oct estimated.</a:t>
+            </a:r>
+          </a:p>
+        </p:txBody>
+      </p:sp>
+      <p:sp>
+        <p:nvSpPr>
+          <p:cNvPr id="401" name="Added box 401"/>
+          <p:cNvSpPr/>
+          <p:nvPr/>
+        </p:nvSpPr>
+        <p:spPr>
+          <a:xfrm>
+            <a:off x="201168" y="3721608"/>
+            <a:ext cx="2926080" cy="164592"/>
+          </a:xfrm>
+          <a:prstGeom prst="rect">
+            <a:avLst/>
+          </a:prstGeom>
+          <a:solidFill>
+            <a:srgbClr val="FFFFFF"/>
+          </a:solidFill>
+          <a:ln w="6350">
+            <a:noFill/>
+          </a:ln>
+        </p:spPr>
+        <p:txBody>
+          <a:bodyPr wrap="square" lIns="36000" tIns="18000" rIns="36000" bIns="18000" anchor="ctr"/>
+          <a:lstStyle/>
+          <a:p>
+            <a:pPr algn="l"/>
+            <a:r>
+              <a:rPr lang="en-US" altLang="ko-KR" dirty="0" sz="800" b="1">
+                <a:solidFill>
+                  <a:srgbClr val="595959"/>
+                </a:solidFill>
+                <a:latin typeface="Arial"/>
+                <a:cs typeface="Arial"/>
+              </a:rPr>
+              <a:t>Baseline before the guards</a:t>
+            </a:r>
+          </a:p>
+        </p:txBody>
+      </p:sp>
+      <p:sp>
+        <p:nvSpPr>
+          <p:cNvPr id="402" name="Added box 402"/>
+          <p:cNvSpPr/>
+          <p:nvPr/>
+        </p:nvSpPr>
+        <p:spPr>
+          <a:xfrm>
+            <a:off x="201168" y="3904488"/>
+            <a:ext cx="914400" cy="457200"/>
+          </a:xfrm>
+          <a:prstGeom prst="roundRect">
+            <a:avLst>
+              <a:gd name="adj" fmla="val 12000"/>
+            </a:avLst>
+          </a:prstGeom>
+          <a:solidFill>
+            <a:srgbClr val="F2F2F2"/>
+          </a:solidFill>
+          <a:ln w="6350">
+            <a:solidFill>
+              <a:srgbClr val="BFBFBF"/>
+            </a:solidFill>
+          </a:ln>
+        </p:spPr>
+        <p:txBody>
+          <a:bodyPr wrap="square" lIns="36000" tIns="18000" rIns="36000" bIns="18000" anchor="ctr"/>
+          <a:lstStyle/>
+          <a:p>
+            <a:pPr algn="ctr"/>
+            <a:r>
+              <a:rPr lang="en-US" altLang="ko-KR" dirty="0" sz="1100" b="1">
+                <a:solidFill>
+                  <a:srgbClr val="A50034"/>
+                </a:solidFill>
+                <a:latin typeface="Arial"/>
+                <a:cs typeface="Arial"/>
+              </a:rPr>
+              <a:t>Nearly all</a:t>
+            </a:r>
+          </a:p>
+          <a:p>
+            <a:pPr algn="ctr"/>
+            <a:r>
+              <a:rPr lang="en-US" altLang="ko-KR" dirty="0" sz="700">
+                <a:solidFill>
+                  <a:srgbClr val="404040"/>
+                </a:solidFill>
+                <a:latin typeface="Arial"/>
+                <a:cs typeface="Arial"/>
+              </a:rPr>
+              <a:t>pallets w/o pos. 12</a:t>
+            </a:r>
+          </a:p>
+        </p:txBody>
+      </p:sp>
+      <p:sp>
+        <p:nvSpPr>
+          <p:cNvPr id="403" name="Added box 403"/>
+          <p:cNvSpPr/>
+          <p:nvPr/>
+        </p:nvSpPr>
+        <p:spPr>
+          <a:xfrm>
+            <a:off x="1188720" y="3904488"/>
+            <a:ext cx="914400" cy="457200"/>
+          </a:xfrm>
+          <a:prstGeom prst="roundRect">
+            <a:avLst>
+              <a:gd name="adj" fmla="val 12000"/>
+            </a:avLst>
+          </a:prstGeom>
+          <a:solidFill>
+            <a:srgbClr val="F2F2F2"/>
+          </a:solidFill>
+          <a:ln w="6350">
+            <a:solidFill>
+              <a:srgbClr val="BFBFBF"/>
+            </a:solidFill>
+          </a:ln>
+        </p:spPr>
+        <p:txBody>
+          <a:bodyPr wrap="square" lIns="36000" tIns="18000" rIns="36000" bIns="18000" anchor="ctr"/>
+          <a:lstStyle/>
+          <a:p>
+            <a:pPr algn="ctr"/>
+            <a:r>
+              <a:rPr lang="en-US" altLang="ko-KR" dirty="0" sz="1100" b="1">
+                <a:solidFill>
+                  <a:srgbClr val="A50034"/>
+                </a:solidFill>
+                <a:latin typeface="Arial"/>
+                <a:cs typeface="Arial"/>
+              </a:rPr>
+              <a:t>24-36</a:t>
+            </a:r>
+          </a:p>
+          <a:p>
+            <a:pPr algn="ctr"/>
+            <a:r>
+              <a:rPr lang="en-US" altLang="ko-KR" dirty="0" sz="700">
+                <a:solidFill>
+                  <a:srgbClr val="404040"/>
+                </a:solidFill>
+                <a:latin typeface="Arial"/>
+                <a:cs typeface="Arial"/>
+              </a:rPr>
+              <a:t>1211 alarms / 12 h</a:t>
+            </a:r>
+          </a:p>
+        </p:txBody>
+      </p:sp>
+      <p:sp>
+        <p:nvSpPr>
+          <p:cNvPr id="404" name="Added box 404"/>
+          <p:cNvSpPr/>
+          <p:nvPr/>
+        </p:nvSpPr>
+        <p:spPr>
+          <a:xfrm>
+            <a:off x="2176272" y="3904488"/>
+            <a:ext cx="914400" cy="457200"/>
+          </a:xfrm>
+          <a:prstGeom prst="roundRect">
+            <a:avLst>
+              <a:gd name="adj" fmla="val 12000"/>
+            </a:avLst>
+          </a:prstGeom>
+          <a:solidFill>
+            <a:srgbClr val="F2F2F2"/>
+          </a:solidFill>
+          <a:ln w="6350">
+            <a:solidFill>
+              <a:srgbClr val="BFBFBF"/>
+            </a:solidFill>
+          </a:ln>
+        </p:spPr>
+        <p:txBody>
+          <a:bodyPr wrap="square" lIns="36000" tIns="18000" rIns="36000" bIns="18000" anchor="ctr"/>
+          <a:lstStyle/>
+          <a:p>
+            <a:pPr algn="ctr"/>
+            <a:r>
+              <a:rPr lang="en-US" altLang="ko-KR" dirty="0" sz="1100" b="1">
+                <a:solidFill>
+                  <a:srgbClr val="A50034"/>
+                </a:solidFill>
+                <a:latin typeface="Arial"/>
+                <a:cs typeface="Arial"/>
+              </a:rPr>
+              <a:t>4 h</a:t>
+            </a:r>
+          </a:p>
+          <a:p>
+            <a:pPr algn="ctr"/>
+            <a:r>
+              <a:rPr lang="en-US" altLang="ko-KR" dirty="0" sz="700">
+                <a:solidFill>
+                  <a:srgbClr val="404040"/>
+                </a:solidFill>
+                <a:latin typeface="Arial"/>
+                <a:cs typeface="Arial"/>
+              </a:rPr>
+              <a:t>#01 stops, 12 Aug</a:t>
+            </a:r>
+          </a:p>
+        </p:txBody>
+      </p:sp>
+      <p:sp>
+        <p:nvSpPr>
+          <p:cNvPr id="405" name="Added box 405"/>
+          <p:cNvSpPr/>
+          <p:nvPr/>
+        </p:nvSpPr>
+        <p:spPr>
+          <a:xfrm>
+            <a:off x="3310128" y="3246120"/>
+            <a:ext cx="2011680" cy="182880"/>
+          </a:xfrm>
+          <a:prstGeom prst="rect">
+            <a:avLst/>
+          </a:prstGeom>
+          <a:solidFill>
+            <a:srgbClr val="FFFFFF"/>
+          </a:solidFill>
+          <a:ln w="6350">
+            <a:noFill/>
+          </a:ln>
+        </p:spPr>
+        <p:txBody>
+          <a:bodyPr wrap="square" lIns="36000" tIns="18000" rIns="36000" bIns="18000" anchor="ctr"/>
+          <a:lstStyle/>
+          <a:p>
+            <a:pPr algn="l"/>
+            <a:r>
+              <a:rPr lang="en-US" altLang="ko-KR" dirty="0" sz="800" b="1">
+                <a:solidFill>
+                  <a:srgbClr val="595959"/>
+                </a:solidFill>
+                <a:latin typeface="Arial"/>
+                <a:cs typeface="Arial"/>
+              </a:rPr>
+              <a:t>Last piece of the pallet (pos. 12)</a:t>
+            </a:r>
+          </a:p>
+        </p:txBody>
+      </p:sp>
+      <p:sp>
+        <p:nvSpPr>
+          <p:cNvPr id="406" name="Added box 406"/>
+          <p:cNvSpPr/>
+          <p:nvPr/>
+        </p:nvSpPr>
+        <p:spPr>
+          <a:xfrm>
+            <a:off x="3346704" y="3465576"/>
+            <a:ext cx="1938528" cy="329184"/>
+          </a:xfrm>
+          <a:prstGeom prst="roundRect">
+            <a:avLst>
+              <a:gd name="adj" fmla="val 12000"/>
+            </a:avLst>
+          </a:prstGeom>
+          <a:solidFill>
+            <a:srgbClr val="F2F2F2"/>
+          </a:solidFill>
+          <a:ln w="6350">
+            <a:solidFill>
+              <a:srgbClr val="BFBFBF"/>
+            </a:solidFill>
+          </a:ln>
+        </p:spPr>
+        <p:txBody>
+          <a:bodyPr wrap="square" lIns="36000" tIns="18000" rIns="36000" bIns="18000" anchor="ctr"/>
+          <a:lstStyle/>
+          <a:p>
+            <a:pPr algn="ctr"/>
+            <a:r>
+              <a:rPr lang="en-US" altLang="ko-KR" dirty="0" sz="800" b="1">
+                <a:solidFill>
+                  <a:srgbClr val="404040"/>
+                </a:solidFill>
+                <a:latin typeface="Arial"/>
+                <a:cs typeface="Arial"/>
+              </a:rPr>
+              <a:t>Read index of palletResultCopy</a:t>
+            </a:r>
+          </a:p>
+        </p:txBody>
+      </p:sp>
+      <p:cxnSp>
+        <p:nvCxnSpPr>
+          <p:cNvPr id="407" name="Arrow 407"/>
+          <p:cNvCxnSpPr/>
+          <p:nvPr/>
+        </p:nvCxnSpPr>
+        <p:spPr>
+          <a:xfrm>
+            <a:off x="4315968" y="3794760"/>
+            <a:ext cx="0" cy="100584"/>
+          </a:xfrm>
+          <a:prstGeom prst="straightConnector1">
+            <a:avLst/>
+          </a:prstGeom>
+          <a:ln w="12700">
+            <a:solidFill>
+              <a:srgbClr val="7F7F7F"/>
+            </a:solidFill>
+            <a:tailEnd type="triangle" w="sm" len="sm"/>
+          </a:ln>
+        </p:spPr>
+      </p:cxnSp>
+      <p:sp>
+        <p:nvSpPr>
+          <p:cNvPr id="408" name="Added box 408"/>
+          <p:cNvSpPr/>
+          <p:nvPr/>
+        </p:nvSpPr>
+        <p:spPr>
+          <a:xfrm>
+            <a:off x="3346704" y="3895344"/>
+            <a:ext cx="1938528" cy="329184"/>
+          </a:xfrm>
+          <a:prstGeom prst="roundRect">
+            <a:avLst>
+              <a:gd name="adj" fmla="val 12000"/>
+            </a:avLst>
+          </a:prstGeom>
+          <a:solidFill>
+            <a:srgbClr val="A50034"/>
+          </a:solidFill>
+          <a:ln w="6350">
+            <a:noFill/>
+          </a:ln>
+        </p:spPr>
+        <p:txBody>
+          <a:bodyPr wrap="square" lIns="36000" tIns="18000" rIns="36000" bIns="18000" anchor="ctr"/>
+          <a:lstStyle/>
+          <a:p>
+            <a:pPr algn="ctr"/>
+            <a:r>
+              <a:rPr lang="en-US" altLang="ko-KR" dirty="0" sz="800" b="1">
+                <a:solidFill>
+                  <a:srgbClr val="FFFFFF"/>
+                </a:solidFill>
+                <a:latin typeface="Arial"/>
+                <a:cs typeface="Arial"/>
+              </a:rPr>
+              <a:t>Index guard: is it in range?</a:t>
+            </a:r>
+          </a:p>
+          <a:p>
+            <a:pPr algn="ctr"/>
+            <a:r>
+              <a:rPr lang="en-US" altLang="ko-KR" dirty="0" sz="650">
+                <a:solidFill>
+                  <a:srgbClr val="FFFFFF"/>
+                </a:solidFill>
+                <a:latin typeface="Arial"/>
+                <a:cs typeface="Arial"/>
+              </a:rPr>
+              <a:t>21 guards in GantryForm.cs</a:t>
+            </a:r>
+          </a:p>
+        </p:txBody>
+      </p:sp>
+      <p:cxnSp>
+        <p:nvCxnSpPr>
+          <p:cNvPr id="409" name="Arrow 409"/>
+          <p:cNvCxnSpPr/>
+          <p:nvPr/>
+        </p:nvCxnSpPr>
+        <p:spPr>
+          <a:xfrm>
+            <a:off x="4315968" y="4224528"/>
+            <a:ext cx="0" cy="100584"/>
+          </a:xfrm>
+          <a:prstGeom prst="straightConnector1">
+            <a:avLst/>
+          </a:prstGeom>
+          <a:ln w="12700">
+            <a:solidFill>
+              <a:srgbClr val="7F7F7F"/>
+            </a:solidFill>
+            <a:tailEnd type="triangle" w="sm" len="sm"/>
+          </a:ln>
+        </p:spPr>
+      </p:cxnSp>
+      <p:sp>
+        <p:nvSpPr>
+          <p:cNvPr id="410" name="Added box 410"/>
+          <p:cNvSpPr/>
+          <p:nvPr/>
+        </p:nvSpPr>
+        <p:spPr>
+          <a:xfrm>
+            <a:off x="3346704" y="4325112"/>
+            <a:ext cx="1938528" cy="329184"/>
+          </a:xfrm>
+          <a:prstGeom prst="roundRect">
+            <a:avLst>
+              <a:gd name="adj" fmla="val 12000"/>
+            </a:avLst>
+          </a:prstGeom>
+          <a:solidFill>
+            <a:srgbClr val="F2F2F2"/>
+          </a:solidFill>
+          <a:ln w="6350">
+            <a:solidFill>
+              <a:srgbClr val="BFBFBF"/>
+            </a:solidFill>
+          </a:ln>
+        </p:spPr>
+        <p:txBody>
+          <a:bodyPr wrap="square" lIns="36000" tIns="18000" rIns="36000" bIns="18000" anchor="ctr"/>
+          <a:lstStyle/>
+          <a:p>
+            <a:pPr algn="ctr"/>
+            <a:r>
+              <a:rPr lang="en-US" altLang="ko-KR" dirty="0" sz="800" b="1">
+                <a:solidFill>
+                  <a:srgbClr val="404040"/>
+                </a:solidFill>
+                <a:latin typeface="Arial"/>
+                <a:cs typeface="Arial"/>
+              </a:rPr>
+              <a:t>In range → piece processed</a:t>
+            </a:r>
+          </a:p>
+          <a:p>
+            <a:pPr algn="ctr"/>
+            <a:r>
+              <a:rPr lang="en-US" altLang="ko-KR" dirty="0" sz="650">
+                <a:solidFill>
+                  <a:srgbClr val="404040"/>
+                </a:solidFill>
+                <a:latin typeface="Arial"/>
+                <a:cs typeface="Arial"/>
+              </a:rPr>
+              <a:t>Out of range → handled + logged</a:t>
+            </a:r>
+          </a:p>
+        </p:txBody>
+      </p:sp>
+      <p:cxnSp>
+        <p:nvCxnSpPr>
+          <p:cNvPr id="411" name="Arrow 411"/>
+          <p:cNvCxnSpPr/>
+          <p:nvPr/>
+        </p:nvCxnSpPr>
+        <p:spPr>
+          <a:xfrm>
+            <a:off x="4315968" y="4654296"/>
+            <a:ext cx="0" cy="100584"/>
+          </a:xfrm>
+          <a:prstGeom prst="straightConnector1">
+            <a:avLst/>
+          </a:prstGeom>
+          <a:ln w="12700">
+            <a:solidFill>
+              <a:srgbClr val="7F7F7F"/>
+            </a:solidFill>
+            <a:tailEnd type="triangle" w="sm" len="sm"/>
+          </a:ln>
+        </p:spPr>
+      </p:cxnSp>
+      <p:sp>
+        <p:nvSpPr>
+          <p:cNvPr id="412" name="Added box 412"/>
+          <p:cNvSpPr/>
+          <p:nvPr/>
+        </p:nvSpPr>
+        <p:spPr>
+          <a:xfrm>
+            <a:off x="3346704" y="4754880"/>
+            <a:ext cx="1938528" cy="329184"/>
+          </a:xfrm>
+          <a:prstGeom prst="roundRect">
+            <a:avLst>
+              <a:gd name="adj" fmla="val 12000"/>
+            </a:avLst>
+          </a:prstGeom>
+          <a:solidFill>
+            <a:srgbClr val="F2F2F2"/>
+          </a:solidFill>
+          <a:ln w="6350">
+            <a:solidFill>
+              <a:srgbClr val="BFBFBF"/>
+            </a:solidFill>
+          </a:ln>
+        </p:spPr>
+        <p:txBody>
+          <a:bodyPr wrap="square" lIns="36000" tIns="18000" rIns="36000" bIns="18000" anchor="ctr"/>
+          <a:lstStyle/>
+          <a:p>
+            <a:pPr algn="ctr"/>
+            <a:r>
+              <a:rPr lang="en-US" altLang="ko-KR" dirty="0" sz="800" b="1">
+                <a:solidFill>
+                  <a:srgbClr val="404040"/>
+                </a:solidFill>
+                <a:latin typeface="Arial"/>
+                <a:cs typeface="Arial"/>
+              </a:rPr>
+              <a:t>Piece reported</a:t>
+            </a:r>
+          </a:p>
+          <a:p>
+            <a:pPr algn="ctr"/>
+            <a:r>
+              <a:rPr lang="en-US" altLang="ko-KR" dirty="0" sz="650">
+                <a:solidFill>
+                  <a:srgbClr val="404040"/>
+                </a:solidFill>
+                <a:latin typeface="Arial"/>
+                <a:cs typeface="Arial"/>
+              </a:rPr>
+              <a:t>flowchart node completes</a:t>
+            </a:r>
+          </a:p>
+        </p:txBody>
+      </p:sp>
+      <p:cxnSp>
+        <p:nvCxnSpPr>
+          <p:cNvPr id="413" name="Arrow 413"/>
+          <p:cNvCxnSpPr/>
+          <p:nvPr/>
+        </p:nvCxnSpPr>
+        <p:spPr>
+          <a:xfrm>
+            <a:off x="4315968" y="5084064"/>
+            <a:ext cx="0" cy="100584"/>
+          </a:xfrm>
+          <a:prstGeom prst="straightConnector1">
+            <a:avLst/>
+          </a:prstGeom>
+          <a:ln w="12700">
+            <a:solidFill>
+              <a:srgbClr val="7F7F7F"/>
+            </a:solidFill>
+            <a:tailEnd type="triangle" w="sm" len="sm"/>
+          </a:ln>
+        </p:spPr>
+      </p:cxnSp>
+      <p:sp>
+        <p:nvSpPr>
+          <p:cNvPr id="414" name="Added box 414"/>
+          <p:cNvSpPr/>
+          <p:nvPr/>
+        </p:nvSpPr>
+        <p:spPr>
+          <a:xfrm>
+            <a:off x="3346704" y="5184648"/>
+            <a:ext cx="1938528" cy="329184"/>
+          </a:xfrm>
+          <a:prstGeom prst="roundRect">
+            <a:avLst>
+              <a:gd name="adj" fmla="val 12000"/>
+            </a:avLst>
+          </a:prstGeom>
+          <a:solidFill>
+            <a:srgbClr val="00703C"/>
+          </a:solidFill>
+          <a:ln w="6350">
+            <a:noFill/>
+          </a:ln>
+        </p:spPr>
+        <p:txBody>
+          <a:bodyPr wrap="square" lIns="36000" tIns="18000" rIns="36000" bIns="18000" anchor="ctr"/>
+          <a:lstStyle/>
+          <a:p>
+            <a:pPr algn="ctr"/>
+            <a:r>
+              <a:rPr lang="en-US" altLang="ko-KR" dirty="0" sz="800" b="1">
+                <a:solidFill>
+                  <a:srgbClr val="FFFFFF"/>
+                </a:solidFill>
+                <a:latin typeface="Arial"/>
+                <a:cs typeface="Arial"/>
+              </a:rPr>
+              <a:t>Pallet released complete</a:t>
+            </a:r>
           </a:p>
         </p:txBody>
       </p:sp>
